--- a/docs/submission/variants/RASTA_AI_SIH26002_TEAM17_V09_BLUEPRINT.pptx
+++ b/docs/submission/variants/RASTA_AI_SIH26002_TEAM17_V09_BLUEPRINT.pptx
@@ -11655,7 +11655,7 @@
                 </a:solidFill>
                 <a:latin typeface="Arial"/>
               </a:rPr>
-              <a:t>Missing or stale evidence is marked UNKNOWN, never counted as safe, and the route goes to an authorised reviewer.</a:t>
+              <a:t>Missing or stale evidence is marked UNKNOWN — never safe — and goes to an authorised reviewer.</a:t>
             </a:r>
           </a:p>
         </p:txBody>
@@ -12061,7 +12061,16 @@
                 </a:solidFill>
                 <a:latin typeface="Arial"/>
               </a:rPr>
-              <a:t>NER corridors close without notice: monsoon rain, landslides, floods, official warnings, single-lane hill roads, no phone signal. A shortest-path router still sends the truck.</a:t>
+              <a:t>Monsoon · landslides · floods · official warnings · single-lane hill roads · no signal.  </a:t>
+            </a:r>
+            <a:r>
+              <a:rPr sz="1000" b="1">
+                <a:solidFill>
+                  <a:srgbClr val="9F1239"/>
+                </a:solidFill>
+                <a:latin typeface="Arial"/>
+              </a:rPr>
+              <a:t>A shortest-path router still sends the truck.</a:t>
             </a:r>
           </a:p>
         </p:txBody>
@@ -16191,7 +16200,7 @@
                 </a:solidFill>
                 <a:latin typeface="Arial"/>
               </a:rPr>
-              <a:t>Manager console — React + TypeScript, manager accounts only · Driver app — React Native / Expo, Android; one login, server-decided role, offline trip package</a:t>
+              <a:t>Manager console (React + TS) · Driver app (React Native / Expo, Android) · one login, server-decided role, offline package</a:t>
             </a:r>
           </a:p>
           <a:p>
@@ -16266,7 +16275,7 @@
                 </a:solidFill>
                 <a:latin typeface="Arial"/>
               </a:rPr>
-              <a:t>Re-scored every 60 s along the road ahead; a reroute is proposed to the manager, never applied silently.</a:t>
+              <a:t>Re-scored every 60 s on the road ahead. A reroute is proposed to the manager, never applied silently.</a:t>
             </a:r>
           </a:p>
         </p:txBody>
@@ -21049,7 +21058,7 @@
                 </a:solidFill>
                 <a:latin typeface="Arial"/>
               </a:rPr>
-              <a:t>The whole lifecycle above was run end to end on a physical Android phone against the hosted backend, on the real road.</a:t>
+              <a:t>Run end to end on a physical Android phone, hosted backend, real road.</a:t>
             </a:r>
           </a:p>
         </p:txBody>
@@ -21450,7 +21459,7 @@
                 </a:solidFill>
                 <a:latin typeface="Arial"/>
               </a:rPr>
-              <a:t>Render cold start → warm /health before the demo  ·  provider rate limits → cached evidence + explicit UNKNOWN  ·  background push needs Firebase config → in-app alerts already work  ·  experimental ML → outside routing until the gate passes</a:t>
+              <a:t>Cold start → warm /health first  ·  rate limits → cached evidence + explicit UNKNOWN  ·  push needs Firebase → in-app alerts work  ·  experimental ML → outside routing</a:t>
             </a:r>
           </a:p>
         </p:txBody>
@@ -23376,7 +23385,7 @@
                 </a:solidFill>
                 <a:latin typeface="Arial"/>
               </a:rPr>
-              <a:t>Route usability and uncertainty visible before dispatch; auditable decisions.</a:t>
+              <a:t>Usability and uncertainty visible before dispatch. Auditable.</a:t>
             </a:r>
           </a:p>
         </p:txBody>
@@ -23472,7 +23481,7 @@
                 </a:solidFill>
                 <a:latin typeface="Arial"/>
               </a:rPr>
-              <a:t>Safer navigation, danger context, emergency support, 23 languages.</a:t>
+              <a:t>Danger context, emergency support, 23 languages.</a:t>
             </a:r>
           </a:p>
         </p:txBody>
@@ -23568,7 +23577,7 @@
                 </a:solidFill>
                 <a:latin typeface="Arial"/>
               </a:rPr>
-              <a:t>More resilient access to food, medicine, fuel and relief supplies.</a:t>
+              <a:t>Resilient access to food, medicine, fuel, relief.</a:t>
             </a:r>
           </a:p>
         </p:txBody>
@@ -23645,7 +23654,7 @@
                 </a:solidFill>
                 <a:latin typeface="Arial"/>
               </a:rPr>
-              <a:t>GOVERNMENT / OPERATIONS</a:t>
+              <a:t>GOVERNMENT / OPS</a:t>
             </a:r>
           </a:p>
           <a:p>
@@ -23664,7 +23673,7 @@
                 </a:solidFill>
                 <a:latin typeface="Arial"/>
               </a:rPr>
-              <a:t>Auditable route evidence and disruption visibility per corridor.</a:t>
+              <a:t>Auditable evidence and disruption per corridor.</a:t>
             </a:r>
           </a:p>
         </p:txBody>
@@ -25913,7 +25922,7 @@
                 </a:solidFill>
                 <a:latin typeface="Arial"/>
               </a:rPr>
-              <a:t>Real screens, APK 1.0.18. One login, server-decided role: a manager gets a mobile fleet view, a driver gets navigation. Each language shows its status — Verified, Draft or English fallback — so nobody is misled.</a:t>
+              <a:t>APK 1.0.18. One login, server-decided role. Every language shows its status — Verified, Draft or English fallback.</a:t>
             </a:r>
           </a:p>
         </p:txBody>
@@ -27789,7 +27798,7 @@
                 </a:solidFill>
                 <a:latin typeface="Arial"/>
               </a:rPr>
-              <a:t>real road geometry, alternatives and turn steps; place search on the corridor</a:t>
+              <a:t>Road geometry, alternatives, turn steps.</a:t>
             </a:r>
           </a:p>
         </p:txBody>
@@ -27904,7 +27913,7 @@
                 </a:solidFill>
                 <a:latin typeface="Arial"/>
               </a:rPr>
-              <a:t>forecast sampled along the road; climb, gradient and steep segments (GLO-90)</a:t>
+              <a:t>Forecast along the road; climb, gradient, steep segments.</a:t>
             </a:r>
           </a:p>
         </p:txBody>
@@ -28019,7 +28028,7 @@
                 </a:solidFill>
                 <a:latin typeface="Arial"/>
               </a:rPr>
-              <a:t>official warnings polled with freshness; river discharge against its 30-day mean</a:t>
+              <a:t>Official warnings with freshness; discharge vs 30-day mean.</a:t>
             </a:r>
           </a:p>
         </p:txBody>
@@ -28134,7 +28143,7 @@
                 </a:solidFill>
                 <a:latin typeface="Arial"/>
               </a:rPr>
-              <a:t>historical exposure; inventory 2007–2017, ≤5 km location-accuracy filter</a:t>
+              <a:t>Historical exposure, 2007–2017, ≤5 km accuracy.</a:t>
             </a:r>
           </a:p>
         </p:txBody>
@@ -28249,7 +28258,7 @@
                 </a:solidFill>
                 <a:latin typeface="Arial"/>
               </a:rPr>
-              <a:t>explains the decision in the driver's language — never safety authority</a:t>
+              <a:t>Explains in the driver's language. Never safety authority.</a:t>
             </a:r>
           </a:p>
         </p:txBody>
@@ -28364,7 +28373,7 @@
                 </a:solidFill>
                 <a:latin typeface="Arial"/>
               </a:rPr>
-              <a:t>AI-based smart logistics and accessibility intelligence for the NER</a:t>
+              <a:t>Smart logistics and accessibility intelligence for the NER.</a:t>
             </a:r>
           </a:p>
         </p:txBody>
@@ -28831,7 +28840,7 @@
                 </a:solidFill>
                 <a:latin typeface="Arial"/>
               </a:rPr>
-              <a:t>on the NER geographic holdout — 154 catalogued events, no NER row used in training</a:t>
+              <a:t>NER geographic holdout · 154 events · no NER row in training</a:t>
             </a:r>
           </a:p>
         </p:txBody>
@@ -29522,7 +29531,7 @@
                 </a:solidFill>
                 <a:latin typeface="Arial"/>
               </a:rPr>
-              <a:t>Strong recall was not enough. Held-out testing exposed the false-positive rate, so the gate keeps the model out of routing.</a:t>
+              <a:t>Recall was not enough. Held-out testing exposed the false-positive rate. The gate keeps it out of routing.</a:t>
             </a:r>
           </a:p>
         </p:txBody>
@@ -29564,7 +29573,7 @@
                 </a:solidFill>
                 <a:latin typeface="Courier New"/>
               </a:rPr>
-              <a:t>Precision 0.32 · F1 0.48 · PR-AUC 0.55 · ROC-AUC 0.83 · Brier 0.12 · calibrated logistic regression on NASA GLC + ERA5-Land rain + DEM slope · docs/HAZARD_ERROR_ANALYSIS.md</a:t>
+              <a:t>Precision 0.32 · F1 0.48 · PR-AUC 0.55 · ROC-AUC 0.83 · Brier 0.12  —  calibrated logistic regression, NASA GLC + ERA5-Land rain + DEM slope</a:t>
             </a:r>
           </a:p>
         </p:txBody>
@@ -29650,7 +29659,7 @@
                 </a:solidFill>
                 <a:latin typeface="Arial"/>
               </a:rPr>
-              <a:t>gpm.nasa.gov/landslides (NASA GLC)  ·  sachet.ndma.gov.in  ·  global-flood.emergency.copernicus.eu (GloFAS)  ·  open-meteo.com · api.met.no  ·  opentopodata.org · Copernicus DEM  ·  project-osrm.org · openstreetmap.org  ·  github.com/nxtlucifer/ner-ai-logistics (repository, tests, model registry)</a:t>
+              <a:t>gpm.nasa.gov/landslides  ·  sachet.ndma.gov.in  ·  global-flood.emergency.copernicus.eu  ·  open-meteo.com  ·  api.met.no  ·  opentopodata.org  ·  project-osrm.org  ·  openstreetmap.org  ·  github.com/nxtlucifer/ner-ai-logistics</a:t>
             </a:r>
           </a:p>
         </p:txBody>
